--- a/docs/articles/assets/pptx/gallery_bar_04.pptx
+++ b/docs/articles/assets/pptx/gallery_bar_04.pptx
@@ -110,7 +110,7 @@
 </p:presentation>
 </file>
 
-<file path=ppt/charts/chart184552302c94.xml><?xml version="1.0" encoding="utf-8"?>
+<file path=ppt/charts/chart170b4241a78.xml><?xml version="1.0" encoding="utf-8"?>
 <c:chartSpace xmlns:c="http://schemas.openxmlformats.org/drawingml/2006/chart" xmlns:a="http://schemas.openxmlformats.org/drawingml/2006/main" xmlns:r="http://schemas.openxmlformats.org/officeDocument/2006/relationships">
   <c:date1904 val="0"/>
   <c:lang val="fr-FR"/>
@@ -124,7 +124,7 @@
     </mc:Fallback>
   </mc:AlternateContent>
   <c:chart>
-    <c:autoTitleDeleted val="0"/>
+    <c:autoTitleDeleted val="1"/>
     <c:plotArea xmlns:c="http://schemas.openxmlformats.org/drawingml/2006/chart" xmlns:a="http://schemas.openxmlformats.org/drawingml/2006/main" xmlns:r="http://schemas.openxmlformats.org/officeDocument/2006/relationships">
       <c:layout/>
       <c:barChart>
@@ -158,6 +158,7 @@
                 </a:srgbClr>
               </a:solidFill>
             </a:ln>
+            <a:effectLst/>
           </c:spPr>
           <c:invertIfNegative val="0"/>
           <c:dLbls>
@@ -167,7 +168,7 @@
               <a:lstStyle/>
               <a:p>
                 <a:pPr>
-                  <a:defRPr>
+                  <a:defRPr cap="none">
                     <a:solidFill>
                       <a:srgbClr val="000000">
                         <a:alpha val="100000"/>
@@ -268,6 +269,7 @@
                 </a:srgbClr>
               </a:solidFill>
             </a:ln>
+            <a:effectLst/>
           </c:spPr>
           <c:invertIfNegative val="0"/>
           <c:dLbls>
@@ -277,7 +279,7 @@
               <a:lstStyle/>
               <a:p>
                 <a:pPr>
-                  <a:defRPr>
+                  <a:defRPr cap="none">
                     <a:solidFill>
                       <a:srgbClr val="000000">
                         <a:alpha val="100000"/>
@@ -378,6 +380,7 @@
                 </a:srgbClr>
               </a:solidFill>
             </a:ln>
+            <a:effectLst/>
           </c:spPr>
           <c:invertIfNegative val="0"/>
           <c:dLbls>
@@ -387,7 +390,7 @@
               <a:lstStyle/>
               <a:p>
                 <a:pPr>
-                  <a:defRPr>
+                  <a:defRPr cap="none">
                     <a:solidFill>
                       <a:srgbClr val="000000">
                         <a:alpha val="100000"/>
@@ -506,7 +509,7 @@
                   <a:defRPr/>
                 </a:pPr>
                 <a:r>
-                  <a:rPr sz="1600" b="1">
+                  <a:rPr cap="none" sz="1600" b="1">
                     <a:solidFill>
                       <a:srgbClr val="000000">
                         <a:alpha val="100000"/>
@@ -531,7 +534,7 @@
           <a:lstStyle/>
           <a:p>
             <a:pPr>
-              <a:defRPr sz="1000">
+              <a:defRPr cap="none" sz="1000">
                 <a:solidFill>
                   <a:srgbClr val="000000">
                     <a:alpha val="100000"/>
@@ -586,7 +589,7 @@
                   <a:defRPr/>
                 </a:pPr>
                 <a:r>
-                  <a:rPr sz="1600" b="1">
+                  <a:rPr cap="none" sz="1600" b="1">
                     <a:solidFill>
                       <a:srgbClr val="000000">
                         <a:alpha val="100000"/>
@@ -611,7 +614,7 @@
           <a:lstStyle/>
           <a:p>
             <a:pPr>
-              <a:defRPr sz="1000">
+              <a:defRPr cap="none" sz="1000">
                 <a:solidFill>
                   <a:srgbClr val="000000">
                     <a:alpha val="100000"/>
@@ -647,7 +650,7 @@
         <a:lstStyle/>
         <a:p>
           <a:pPr>
-            <a:defRPr sz="1400">
+            <a:defRPr cap="none" sz="1400">
               <a:solidFill>
                 <a:srgbClr val="000000">
                   <a:alpha val="100000"/>
